--- a/morning-registration-activities/compliment-chain/downloads/Compliment_Chain.pptx
+++ b/morning-registration-activities/compliment-chain/downloads/Compliment_Chain.pptx
@@ -1042,6 +1042,10 @@
             </a:outerShdw>
           </a:effectLst>
         </p:spPr>
+        <p:txBody>
+          <a:bodyPr/>
+          <a:p/>
+        </p:txBody>
       </p:sp>
       <p:sp>
         <p:nvSpPr>
@@ -1062,6 +1066,10 @@
           </a:solidFill>
           <a:ln/>
         </p:spPr>
+        <p:txBody>
+          <a:bodyPr/>
+          <a:p/>
+        </p:txBody>
       </p:sp>
       <p:pic>
         <p:nvPicPr>
@@ -1111,6 +1119,10 @@
             <a:prstDash val="solid"/>
           </a:ln>
         </p:spPr>
+        <p:txBody>
+          <a:bodyPr/>
+          <a:p/>
+        </p:txBody>
       </p:sp>
       <p:sp>
         <p:nvSpPr>
@@ -1265,6 +1277,10 @@
             </a:outerShdw>
           </a:effectLst>
         </p:spPr>
+        <p:txBody>
+          <a:bodyPr/>
+          <a:p/>
+        </p:txBody>
       </p:sp>
       <p:sp>
         <p:nvSpPr>
@@ -1285,6 +1301,10 @@
           </a:solidFill>
           <a:ln/>
         </p:spPr>
+        <p:txBody>
+          <a:bodyPr/>
+          <a:p/>
+        </p:txBody>
       </p:sp>
       <p:pic>
         <p:nvPicPr>
@@ -1334,6 +1354,10 @@
             <a:prstDash val="solid"/>
           </a:ln>
         </p:spPr>
+        <p:txBody>
+          <a:bodyPr/>
+          <a:p/>
+        </p:txBody>
       </p:sp>
       <p:sp>
         <p:nvSpPr>
@@ -1449,7 +1473,7 @@
                 <a:ea typeface="Karla" pitchFamily="34" charset="-122"/>
                 <a:cs typeface="Karla" pitchFamily="34" charset="-120"/>
               </a:rPr>
-              <a:t>Something true and kind, in your own words. No name at the bottom, it stays anonymous.</a:t>
+              <a:t>Something true and kind, in your own words. No name at the bottom, so it stays anonymous.</a:t>
             </a:r>
             <a:endParaRPr lang="en-US" sz="1150" dirty="0"/>
           </a:p>
@@ -1488,6 +1512,10 @@
             </a:outerShdw>
           </a:effectLst>
         </p:spPr>
+        <p:txBody>
+          <a:bodyPr/>
+          <a:p/>
+        </p:txBody>
       </p:sp>
       <p:sp>
         <p:nvSpPr>
@@ -1508,6 +1536,10 @@
           </a:solidFill>
           <a:ln/>
         </p:spPr>
+        <p:txBody>
+          <a:bodyPr/>
+          <a:p/>
+        </p:txBody>
       </p:sp>
       <p:pic>
         <p:nvPicPr>
@@ -1557,6 +1589,10 @@
             <a:prstDash val="solid"/>
           </a:ln>
         </p:spPr>
+        <p:txBody>
+          <a:bodyPr/>
+          <a:p/>
+        </p:txBody>
       </p:sp>
       <p:sp>
         <p:nvSpPr>

--- a/morning-registration-activities/compliment-chain/downloads/Compliment_Chain.pptx
+++ b/morning-registration-activities/compliment-chain/downloads/Compliment_Chain.pptx
@@ -921,9 +921,9 @@
                 <a:solidFill>
                   <a:srgbClr val="887C49"/>
                 </a:solidFill>
-                <a:latin typeface="Karla" pitchFamily="34" charset="0"/>
-                <a:ea typeface="Karla" pitchFamily="34" charset="-122"/>
-                <a:cs typeface="Karla" pitchFamily="34" charset="-120"/>
+                <a:latin typeface="Calibri" pitchFamily="34" charset="0"/>
+                <a:ea typeface="Calibri" pitchFamily="34" charset="-122"/>
+                <a:cs typeface="Calibri" pitchFamily="34" charset="-120"/>
               </a:rPr>
               <a:t>MORNING REGISTRATION ACTIVITIES</a:t>
             </a:r>
@@ -956,13 +956,13 @@
               <a:buNone/>
             </a:pPr>
             <a:r>
-              <a:rPr lang="en-US" sz="4400" b="1" dirty="0">
+              <a:rPr lang="en-US" sz="4400" b="0" dirty="0">
                 <a:solidFill>
                   <a:srgbClr val="6D653B"/>
                 </a:solidFill>
-                <a:latin typeface="Libre Caslon Display" pitchFamily="34" charset="0"/>
-                <a:ea typeface="Libre Caslon Display" pitchFamily="34" charset="-122"/>
-                <a:cs typeface="Libre Caslon Display" pitchFamily="34" charset="-120"/>
+                <a:latin typeface="Georgia" pitchFamily="34" charset="0"/>
+                <a:ea typeface="Georgia" pitchFamily="34" charset="-122"/>
+                <a:cs typeface="Georgia" pitchFamily="34" charset="-120"/>
               </a:rPr>
               <a:t>Compliment Chain</a:t>
             </a:r>
@@ -999,9 +999,9 @@
                 <a:solidFill>
                   <a:srgbClr val="887C49"/>
                 </a:solidFill>
-                <a:latin typeface="Karla" pitchFamily="34" charset="0"/>
-                <a:ea typeface="Karla" pitchFamily="34" charset="-122"/>
-                <a:cs typeface="Karla" pitchFamily="34" charset="-120"/>
+                <a:latin typeface="Calibri" pitchFamily="34" charset="0"/>
+                <a:ea typeface="Calibri" pitchFamily="34" charset="-122"/>
+                <a:cs typeface="Calibri" pitchFamily="34" charset="-120"/>
               </a:rPr>
               <a:t>Every student writes one honest compliment for someone else in the form, with no name attached.</a:t>
             </a:r>
@@ -1153,9 +1153,9 @@
                 <a:solidFill>
                   <a:srgbClr val="FFFDF7"/>
                 </a:solidFill>
-                <a:latin typeface="Karla" pitchFamily="34" charset="0"/>
-                <a:ea typeface="Karla" pitchFamily="34" charset="-122"/>
-                <a:cs typeface="Karla" pitchFamily="34" charset="-120"/>
+                <a:latin typeface="Calibri" pitchFamily="34" charset="0"/>
+                <a:ea typeface="Calibri" pitchFamily="34" charset="-122"/>
+                <a:cs typeface="Calibri" pitchFamily="34" charset="-120"/>
               </a:rPr>
               <a:t>1</a:t>
             </a:r>
@@ -1192,9 +1192,9 @@
                 <a:solidFill>
                   <a:srgbClr val="6D653B"/>
                 </a:solidFill>
-                <a:latin typeface="Karla" pitchFamily="34" charset="0"/>
-                <a:ea typeface="Karla" pitchFamily="34" charset="-122"/>
-                <a:cs typeface="Karla" pitchFamily="34" charset="-120"/>
+                <a:latin typeface="Calibri" pitchFamily="34" charset="0"/>
+                <a:ea typeface="Calibri" pitchFamily="34" charset="-122"/>
+                <a:cs typeface="Calibri" pitchFamily="34" charset="-120"/>
               </a:rPr>
               <a:t>Get your note</a:t>
             </a:r>
@@ -1234,9 +1234,9 @@
                 <a:solidFill>
                   <a:srgbClr val="887C49"/>
                 </a:solidFill>
-                <a:latin typeface="Karla" pitchFamily="34" charset="0"/>
-                <a:ea typeface="Karla" pitchFamily="34" charset="-122"/>
-                <a:cs typeface="Karla" pitchFamily="34" charset="-120"/>
+                <a:latin typeface="Calibri" pitchFamily="34" charset="0"/>
+                <a:ea typeface="Calibri" pitchFamily="34" charset="-122"/>
+                <a:cs typeface="Calibri" pitchFamily="34" charset="-120"/>
               </a:rPr>
               <a:t>You’ll be given a note with a name already on it. That’s who you’re writing for.</a:t>
             </a:r>
@@ -1388,9 +1388,9 @@
                 <a:solidFill>
                   <a:srgbClr val="FFFDF7"/>
                 </a:solidFill>
-                <a:latin typeface="Karla" pitchFamily="34" charset="0"/>
-                <a:ea typeface="Karla" pitchFamily="34" charset="-122"/>
-                <a:cs typeface="Karla" pitchFamily="34" charset="-120"/>
+                <a:latin typeface="Calibri" pitchFamily="34" charset="0"/>
+                <a:ea typeface="Calibri" pitchFamily="34" charset="-122"/>
+                <a:cs typeface="Calibri" pitchFamily="34" charset="-120"/>
               </a:rPr>
               <a:t>2</a:t>
             </a:r>
@@ -1427,9 +1427,9 @@
                 <a:solidFill>
                   <a:srgbClr val="6D653B"/>
                 </a:solidFill>
-                <a:latin typeface="Karla" pitchFamily="34" charset="0"/>
-                <a:ea typeface="Karla" pitchFamily="34" charset="-122"/>
-                <a:cs typeface="Karla" pitchFamily="34" charset="-120"/>
+                <a:latin typeface="Calibri" pitchFamily="34" charset="0"/>
+                <a:ea typeface="Calibri" pitchFamily="34" charset="-122"/>
+                <a:cs typeface="Calibri" pitchFamily="34" charset="-120"/>
               </a:rPr>
               <a:t>Write one compliment</a:t>
             </a:r>
@@ -1469,9 +1469,9 @@
                 <a:solidFill>
                   <a:srgbClr val="887C49"/>
                 </a:solidFill>
-                <a:latin typeface="Karla" pitchFamily="34" charset="0"/>
-                <a:ea typeface="Karla" pitchFamily="34" charset="-122"/>
-                <a:cs typeface="Karla" pitchFamily="34" charset="-120"/>
+                <a:latin typeface="Calibri" pitchFamily="34" charset="0"/>
+                <a:ea typeface="Calibri" pitchFamily="34" charset="-122"/>
+                <a:cs typeface="Calibri" pitchFamily="34" charset="-120"/>
               </a:rPr>
               <a:t>Something true and kind, in your own words. No name at the bottom, so it stays anonymous.</a:t>
             </a:r>
@@ -1623,9 +1623,9 @@
                 <a:solidFill>
                   <a:srgbClr val="FFFDF7"/>
                 </a:solidFill>
-                <a:latin typeface="Karla" pitchFamily="34" charset="0"/>
-                <a:ea typeface="Karla" pitchFamily="34" charset="-122"/>
-                <a:cs typeface="Karla" pitchFamily="34" charset="-120"/>
+                <a:latin typeface="Calibri" pitchFamily="34" charset="0"/>
+                <a:ea typeface="Calibri" pitchFamily="34" charset="-122"/>
+                <a:cs typeface="Calibri" pitchFamily="34" charset="-120"/>
               </a:rPr>
               <a:t>3</a:t>
             </a:r>
@@ -1662,9 +1662,9 @@
                 <a:solidFill>
                   <a:srgbClr val="6D653B"/>
                 </a:solidFill>
-                <a:latin typeface="Karla" pitchFamily="34" charset="0"/>
-                <a:ea typeface="Karla" pitchFamily="34" charset="-122"/>
-                <a:cs typeface="Karla" pitchFamily="34" charset="-120"/>
+                <a:latin typeface="Calibri" pitchFamily="34" charset="0"/>
+                <a:ea typeface="Calibri" pitchFamily="34" charset="-122"/>
+                <a:cs typeface="Calibri" pitchFamily="34" charset="-120"/>
               </a:rPr>
               <a:t>Hand it in</a:t>
             </a:r>
@@ -1704,9 +1704,9 @@
                 <a:solidFill>
                   <a:srgbClr val="887C49"/>
                 </a:solidFill>
-                <a:latin typeface="Karla" pitchFamily="34" charset="0"/>
-                <a:ea typeface="Karla" pitchFamily="34" charset="-122"/>
-                <a:cs typeface="Karla" pitchFamily="34" charset="-120"/>
+                <a:latin typeface="Calibri" pitchFamily="34" charset="0"/>
+                <a:ea typeface="Calibri" pitchFamily="34" charset="-122"/>
+                <a:cs typeface="Calibri" pitchFamily="34" charset="-120"/>
               </a:rPr>
               <a:t>Give it to your teacher. Tomorrow, you’ll get a note that someone wrote about you.</a:t>
             </a:r>
@@ -1743,9 +1743,9 @@
                 <a:solidFill>
                   <a:srgbClr val="A49865"/>
                 </a:solidFill>
-                <a:latin typeface="Karla" pitchFamily="34" charset="0"/>
-                <a:ea typeface="Karla" pitchFamily="34" charset="-122"/>
-                <a:cs typeface="Karla" pitchFamily="34" charset="-120"/>
+                <a:latin typeface="Calibri" pitchFamily="34" charset="0"/>
+                <a:ea typeface="Calibri" pitchFamily="34" charset="-122"/>
+                <a:cs typeface="Calibri" pitchFamily="34" charset="-120"/>
               </a:rPr>
               <a:t>Needs: pre-printed compliment notes (see the resource pack) and a pen each.</a:t>
             </a:r>
@@ -1806,9 +1806,9 @@
                 <a:solidFill>
                   <a:srgbClr val="A49865"/>
                 </a:solidFill>
-                <a:latin typeface="Libre Caslon Display" pitchFamily="34" charset="0"/>
-                <a:ea typeface="Libre Caslon Display" pitchFamily="34" charset="-122"/>
-                <a:cs typeface="Libre Caslon Display" pitchFamily="34" charset="-120"/>
+                <a:latin typeface="Georgia" pitchFamily="34" charset="0"/>
+                <a:ea typeface="Georgia" pitchFamily="34" charset="-122"/>
+                <a:cs typeface="Georgia" pitchFamily="34" charset="-120"/>
               </a:rPr>
               <a:t>The Pastoral Guide</a:t>
             </a:r>
